--- a/CropSurvive_Poster.pptx
+++ b/CropSurvive_Poster.pptx
@@ -2207,9 +2207,6 @@
           <a:bodyPr wrap="square" rtlCol="0" anchor="t"/>
           <a:lstStyle/>
           <a:p>
-            <a:pPr marL="0" indent="0" algn="l">
-              <a:buNone/>
-            </a:pPr>
             <a:r>
               <a:rPr lang="en-US" sz="4000" dirty="0">
                 <a:solidFill>
@@ -2219,7 +2216,7 @@
                 <a:ea typeface="Cambria" pitchFamily="34" charset="-122"/>
                 <a:cs typeface="Cambria" pitchFamily="34" charset="-120"/>
               </a:rPr>
-              <a:t>Multiple dependent variables tracked across all formulations and control groups, including visual tissue integrity, microbial counts, and structural measurements.</a:t>
+              <a:t>Multiple dependent variables tracked across all formulations and control groups, including visual tissue integrity, microbial counts, Co2 &amp; O2 emissions, weight loss and structural measurements,</a:t>
             </a:r>
             <a:endParaRPr lang="en-US" sz="4000" dirty="0"/>
           </a:p>
@@ -4936,135 +4933,6 @@
       </p:sp>
       <p:sp>
         <p:nvSpPr>
-          <p:cNvPr id="123" name="Shape 112"/>
-          <p:cNvSpPr/>
-          <p:nvPr/>
-        </p:nvSpPr>
-        <p:spPr>
-          <a:xfrm>
-            <a:off x="20445984" y="26490168"/>
-            <a:ext cx="8988552" cy="2331720"/>
-          </a:xfrm>
-          <a:prstGeom prst="roundRect">
-            <a:avLst>
-              <a:gd name="adj" fmla="val 3922"/>
-            </a:avLst>
-          </a:prstGeom>
-          <a:solidFill>
-            <a:srgbClr val="1B4332"/>
-          </a:solidFill>
-          <a:ln w="12700">
-            <a:solidFill>
-              <a:srgbClr val="2D6A4F"/>
-            </a:solidFill>
-            <a:prstDash val="solid"/>
-          </a:ln>
-        </p:spPr>
-        <p:txBody>
-          <a:bodyPr/>
-          <a:lstStyle/>
-          <a:p>
-            <a:endParaRPr lang="en-US"/>
-          </a:p>
-        </p:txBody>
-      </p:sp>
-      <p:sp>
-        <p:nvSpPr>
-          <p:cNvPr id="124" name="Shape 113"/>
-          <p:cNvSpPr/>
-          <p:nvPr/>
-        </p:nvSpPr>
-        <p:spPr>
-          <a:xfrm>
-            <a:off x="20537424" y="26654760"/>
-            <a:ext cx="658368" cy="658368"/>
-          </a:xfrm>
-          <a:prstGeom prst="ellipse">
-            <a:avLst/>
-          </a:prstGeom>
-          <a:solidFill>
-            <a:srgbClr val="2D6A4F"/>
-          </a:solidFill>
-          <a:ln w="12700">
-            <a:solidFill>
-              <a:srgbClr val="74B49B"/>
-            </a:solidFill>
-            <a:prstDash val="solid"/>
-          </a:ln>
-        </p:spPr>
-        <p:txBody>
-          <a:bodyPr/>
-          <a:lstStyle/>
-          <a:p>
-            <a:endParaRPr lang="en-US"/>
-          </a:p>
-        </p:txBody>
-      </p:sp>
-      <p:pic>
-        <p:nvPicPr>
-          <p:cNvPr id="125" name="Image 6" descr="preencoded.png"/>
-          <p:cNvPicPr>
-            <a:picLocks noChangeAspect="1"/>
-          </p:cNvPicPr>
-          <p:nvPr/>
-        </p:nvPicPr>
-        <p:blipFill>
-          <a:blip r:embed="rId9"/>
-          <a:stretch>
-            <a:fillRect/>
-          </a:stretch>
-        </p:blipFill>
-        <p:spPr>
-          <a:xfrm>
-            <a:off x="20638008" y="26755344"/>
-            <a:ext cx="457200" cy="457200"/>
-          </a:xfrm>
-          <a:prstGeom prst="rect">
-            <a:avLst/>
-          </a:prstGeom>
-        </p:spPr>
-      </p:pic>
-      <p:sp>
-        <p:nvSpPr>
-          <p:cNvPr id="126" name="Text 114"/>
-          <p:cNvSpPr/>
-          <p:nvPr/>
-        </p:nvSpPr>
-        <p:spPr>
-          <a:xfrm>
-            <a:off x="21323808" y="26654760"/>
-            <a:ext cx="8019288" cy="457200"/>
-          </a:xfrm>
-          <a:prstGeom prst="rect">
-            <a:avLst/>
-          </a:prstGeom>
-          <a:noFill/>
-          <a:ln/>
-        </p:spPr>
-        <p:txBody>
-          <a:bodyPr wrap="square" lIns="0" tIns="0" rIns="0" bIns="0" rtlCol="0" anchor="t"/>
-          <a:lstStyle/>
-          <a:p>
-            <a:pPr marL="0" indent="0" algn="l">
-              <a:buNone/>
-            </a:pPr>
-            <a:r>
-              <a:rPr lang="en-US" sz="2800" b="1" dirty="0">
-                <a:solidFill>
-                  <a:srgbClr val="C8973A"/>
-                </a:solidFill>
-                <a:latin typeface="Arial" pitchFamily="34" charset="0"/>
-                <a:ea typeface="Arial" pitchFamily="34" charset="-122"/>
-                <a:cs typeface="Arial" pitchFamily="34" charset="-120"/>
-              </a:rPr>
-              <a:t>Leverage Spatial Cellular Modeling</a:t>
-            </a:r>
-            <a:endParaRPr lang="en-US" sz="2800" dirty="0"/>
-          </a:p>
-        </p:txBody>
-      </p:sp>
-      <p:sp>
-        <p:nvSpPr>
           <p:cNvPr id="127" name="Text 115"/>
           <p:cNvSpPr/>
           <p:nvPr/>
@@ -5298,7 +5166,7 @@
           <p:nvPr/>
         </p:nvPicPr>
         <p:blipFill>
-          <a:blip r:embed="rId10"/>
+          <a:blip r:embed="rId9"/>
           <a:stretch>
             <a:fillRect/>
           </a:stretch>
@@ -5328,7 +5196,7 @@
           <p:nvPr/>
         </p:nvPicPr>
         <p:blipFill>
-          <a:blip r:embed="rId11"/>
+          <a:blip r:embed="rId10"/>
           <a:stretch>
             <a:fillRect/>
           </a:stretch>
@@ -5358,7 +5226,7 @@
           <p:nvPr/>
         </p:nvPicPr>
         <p:blipFill>
-          <a:blip r:embed="rId12"/>
+          <a:blip r:embed="rId11"/>
           <a:stretch>
             <a:fillRect/>
           </a:stretch>
@@ -5388,7 +5256,7 @@
           <p:nvPr/>
         </p:nvPicPr>
         <p:blipFill>
-          <a:blip r:embed="rId13"/>
+          <a:blip r:embed="rId12"/>
           <a:stretch>
             <a:fillRect/>
           </a:stretch>
@@ -5418,7 +5286,7 @@
           <p:nvPr/>
         </p:nvPicPr>
         <p:blipFill>
-          <a:blip r:embed="rId14">
+          <a:blip r:embed="rId13">
             <a:extLst>
               <a:ext uri="{28A0092B-C50C-407E-A947-70E740481C1C}">
                 <a14:useLocalDpi xmlns:a14="http://schemas.microsoft.com/office/drawing/2010/main" val="0"/>
@@ -5465,14 +5333,14 @@
           <p:nvPr/>
         </p:nvPicPr>
         <p:blipFill>
-          <a:blip r:embed="rId15"/>
+          <a:blip r:embed="rId14"/>
           <a:stretch>
             <a:fillRect/>
           </a:stretch>
         </p:blipFill>
         <p:spPr>
           <a:xfrm>
-            <a:off x="20445984" y="29172841"/>
+            <a:off x="20560284" y="26670941"/>
             <a:ext cx="9006840" cy="6544588"/>
           </a:xfrm>
           <a:prstGeom prst="rect">
@@ -5495,6 +5363,36 @@
           <p:nvPr/>
         </p:nvPicPr>
         <p:blipFill>
+          <a:blip r:embed="rId15"/>
+          <a:stretch>
+            <a:fillRect/>
+          </a:stretch>
+        </p:blipFill>
+        <p:spPr>
+          <a:xfrm>
+            <a:off x="24805035" y="438912"/>
+            <a:ext cx="2411065" cy="2453865"/>
+          </a:xfrm>
+          <a:prstGeom prst="rect">
+            <a:avLst/>
+          </a:prstGeom>
+        </p:spPr>
+      </p:pic>
+      <p:pic>
+        <p:nvPicPr>
+          <p:cNvPr id="7" name="Picture 6">
+            <a:extLst>
+              <a:ext uri="{FF2B5EF4-FFF2-40B4-BE49-F238E27FC236}">
+                <a16:creationId xmlns:a16="http://schemas.microsoft.com/office/drawing/2014/main" id="{0C0E0A68-1179-4EFB-B7C0-4BF93DE487F1}"/>
+              </a:ext>
+            </a:extLst>
+          </p:cNvPr>
+          <p:cNvPicPr>
+            <a:picLocks noChangeAspect="1"/>
+          </p:cNvPicPr>
+          <p:nvPr/>
+        </p:nvPicPr>
+        <p:blipFill>
           <a:blip r:embed="rId16"/>
           <a:stretch>
             <a:fillRect/>
@@ -5502,8 +5400,8 @@
         </p:blipFill>
         <p:spPr>
           <a:xfrm>
-            <a:off x="24805035" y="438912"/>
-            <a:ext cx="2411065" cy="2453865"/>
+            <a:off x="20537424" y="33572452"/>
+            <a:ext cx="9029700" cy="4384292"/>
           </a:xfrm>
           <a:prstGeom prst="rect">
             <a:avLst/>
